--- a/docs/decks/Longrun_Planning.pptx
+++ b/docs/decks/Longrun_Planning.pptx
@@ -3311,7 +3311,7 @@
                   <a:srgbClr val="999999"/>
                 </a:solidFill>
               </a:rPr>
-              <a:t>code v1.4  ·  2026-07-12  ·  1/12</a:t>
+              <a:t>code v1.5  ·  2026-07-13  ·  1/12</a:t>
             </a:r>
           </a:p>
         </p:txBody>
@@ -3660,7 +3660,7 @@
                   <a:srgbClr val="999999"/>
                 </a:solidFill>
               </a:rPr>
-              <a:t>code v1.4  ·  2026-07-12  ·  10/12</a:t>
+              <a:t>code v1.5  ·  2026-07-13  ·  10/12</a:t>
             </a:r>
           </a:p>
         </p:txBody>
@@ -4529,7 +4529,7 @@
                   <a:srgbClr val="999999"/>
                 </a:solidFill>
               </a:rPr>
-              <a:t>code v1.4  ·  2026-07-12  ·  11/12</a:t>
+              <a:t>code v1.5  ·  2026-07-13  ·  11/12</a:t>
             </a:r>
           </a:p>
         </p:txBody>
@@ -4893,7 +4893,7 @@
                   <a:srgbClr val="999999"/>
                 </a:solidFill>
               </a:rPr>
-              <a:t>code v1.4  ·  2026-07-12  ·  12/12</a:t>
+              <a:t>code v1.5  ·  2026-07-13  ·  12/12</a:t>
             </a:r>
           </a:p>
         </p:txBody>
@@ -5227,7 +5227,7 @@
                   <a:srgbClr val="999999"/>
                 </a:solidFill>
               </a:rPr>
-              <a:t>code v1.4  ·  2026-07-12  ·  2/12</a:t>
+              <a:t>code v1.5  ·  2026-07-13  ·  2/12</a:t>
             </a:r>
           </a:p>
         </p:txBody>
@@ -5531,7 +5531,7 @@
                   <a:srgbClr val="999999"/>
                 </a:solidFill>
               </a:rPr>
-              <a:t>code v1.4  ·  2026-07-12  ·  3/12</a:t>
+              <a:t>code v1.5  ·  2026-07-13  ·  3/12</a:t>
             </a:r>
           </a:p>
         </p:txBody>
@@ -5880,7 +5880,7 @@
                   <a:srgbClr val="999999"/>
                 </a:solidFill>
               </a:rPr>
-              <a:t>code v1.4  ·  2026-07-12  ·  4/12</a:t>
+              <a:t>code v1.5  ·  2026-07-13  ·  4/12</a:t>
             </a:r>
           </a:p>
         </p:txBody>
@@ -6244,7 +6244,7 @@
                   <a:srgbClr val="999999"/>
                 </a:solidFill>
               </a:rPr>
-              <a:t>code v1.4  ·  2026-07-12  ·  5/12</a:t>
+              <a:t>code v1.5  ·  2026-07-13  ·  5/12</a:t>
             </a:r>
           </a:p>
         </p:txBody>
@@ -6721,7 +6721,7 @@
                   <a:srgbClr val="999999"/>
                 </a:solidFill>
               </a:rPr>
-              <a:t>code v1.4  ·  2026-07-12  ·  6/12</a:t>
+              <a:t>code v1.5  ·  2026-07-13  ·  6/12</a:t>
             </a:r>
           </a:p>
         </p:txBody>
@@ -6980,7 +6980,7 @@
                   <a:srgbClr val="999999"/>
                 </a:solidFill>
               </a:rPr>
-              <a:t>code v1.4  ·  2026-07-12  ·  7/12</a:t>
+              <a:t>code v1.5  ·  2026-07-13  ·  7/12</a:t>
             </a:r>
           </a:p>
         </p:txBody>
@@ -7284,7 +7284,7 @@
                   <a:srgbClr val="999999"/>
                 </a:solidFill>
               </a:rPr>
-              <a:t>code v1.4  ·  2026-07-12  ·  8/12</a:t>
+              <a:t>code v1.5  ·  2026-07-13  ·  8/12</a:t>
             </a:r>
           </a:p>
         </p:txBody>
@@ -7588,7 +7588,7 @@
                   <a:srgbClr val="999999"/>
                 </a:solidFill>
               </a:rPr>
-              <a:t>code v1.4  ·  2026-07-12  ·  9/12</a:t>
+              <a:t>code v1.5  ·  2026-07-13  ·  9/12</a:t>
             </a:r>
           </a:p>
         </p:txBody>
